--- a/pitch/onepagers/trusight_onepager_capabilities.pptx
+++ b/pitch/onepagers/trusight_onepager_capabilities.pptx
@@ -1529,7 +1529,7 @@
                 <a:ea typeface="Trebuchet MS" pitchFamily="34" charset="-122"/>
                 <a:cs typeface="Trebuchet MS" pitchFamily="34" charset="-120"/>
               </a:rPr>
-              <a:t>Backlash early warning</a:t>
+              <a:t>Trial-balloon reception</a:t>
             </a:r>
             <a:endParaRPr lang="en-US" sz="1100" dirty="0"/>
           </a:p>
@@ -1568,7 +1568,7 @@
                 <a:ea typeface="Trebuchet MS" pitchFamily="34" charset="-122"/>
                 <a:cs typeface="Trebuchet MS" pitchFamily="34" charset="-120"/>
               </a:rPr>
-              <a:t>OGL-Tier Backlash Detector  ★</a:t>
+              <a:t>Trial-Balloon Reception  ★</a:t>
             </a:r>
             <a:endParaRPr lang="en-US" sz="1050" dirty="0"/>
           </a:p>
@@ -1607,7 +1607,7 @@
                 <a:ea typeface="Calibri" pitchFamily="34" charset="-122"/>
                 <a:cs typeface="Calibri" pitchFamily="34" charset="-120"/>
               </a:rPr>
-              <a:t>Daily-cadence community sentiment. If WotC pre-hints a move (Asmodee printing partnership, OGL revision, AI policy change), Trusight surfaces the reaction within 24 hours — before commitment. Not a minute-level crisis monitor; a trial-balloon detector.</a:t>
+              <a:t>Daily-cadence community sentiment. When a strategic move goes public — a partnership announcement, a policy direction, a product strategy shift — Trusight surfaces the community's read within 24 hours, before commitment. Not a crisis monitor; a trial-balloon detector.</a:t>
             </a:r>
             <a:endParaRPr lang="en-US" sz="850" dirty="0"/>
           </a:p>
@@ -2716,7 +2716,7 @@
                 <a:ea typeface="Calibri" pitchFamily="34" charset="-122"/>
                 <a:cs typeface="Calibri" pitchFamily="34" charset="-120"/>
               </a:rPr>
-              <a:t>phil@trusight.ai</a:t>
+              <a:t>phil@trusightdata.ai</a:t>
             </a:r>
             <a:pPr algn="ctr" indent="0" marL="0">
               <a:buNone/>
@@ -2730,7 +2730,7 @@
                 <a:ea typeface="Calibri" pitchFamily="34" charset="-122"/>
                 <a:cs typeface="Calibri" pitchFamily="34" charset="-120"/>
               </a:rPr>
-              <a:t>  ·  trusight.ai</a:t>
+              <a:t>  ·  trusightdata.ai</a:t>
             </a:r>
             <a:endParaRPr lang="en-US" sz="1100" dirty="0"/>
           </a:p>

--- a/pitch/onepagers/trusight_onepager_capabilities.pptx
+++ b/pitch/onepagers/trusight_onepager_capabilities.pptx
@@ -2574,7 +2574,7 @@
                 <a:ea typeface="Trebuchet MS" pitchFamily="34" charset="-122"/>
                 <a:cs typeface="Trebuchet MS" pitchFamily="34" charset="-120"/>
               </a:rPr>
-              <a:t>12+ LIVE SIGNAL STREAMS</a:t>
+              <a:t>25+ LIVE SIGNAL STREAMS</a:t>
             </a:r>
             <a:pPr algn="ctr" indent="0" marL="0">
               <a:buNone/>
@@ -2702,7 +2702,7 @@
                 <a:ea typeface="Calibri" pitchFamily="34" charset="-122"/>
                 <a:cs typeface="Calibri" pitchFamily="34" charset="-120"/>
               </a:rPr>
-              <a:t>Phil Trubbel  ·  </a:t>
+              <a:t>Phil Jones  ·  </a:t>
             </a:r>
             <a:pPr algn="ctr" indent="0" marL="0">
               <a:buNone/>
